--- a/Unit decks/Unit 11 - Culture Reinforcement & Organisational Health.pptx
+++ b/Unit decks/Unit 11 - Culture Reinforcement & Organisational Health.pptx
@@ -630,6 +630,34 @@
             </a:r>
             <a:endParaRPr lang="en-US" dirty="0"/>
           </a:p>
+          <a:p/>
+          <a:p>
+            <a:r>
+              <a:t>Professional insights:</a:t>
+            </a:r>
+          </a:p>
+          <a:p/>
+          <a:p>
+            <a:r>
+              <a:t>The fruit test: A team’s actual culture is what it produces consistently: the quality of the work, the way conflict is handled, the speed of follow-through and the treatment of junior staff. List five concrete outputs and behaviours from the last quarter and ask whether they match the culture the team claims.</a:t>
+            </a:r>
+          </a:p>
+          <a:p>
+            <a:r>
+              <a:t>Source: Journal, 27 April 2026 — Professional Insights: Culture</a:t>
+            </a:r>
+          </a:p>
+          <a:p/>
+          <a:p>
+            <a:r>
+              <a:t>Does truth travel?: In some organisations people say what is safe, meetings perform consensus and difficult feedback never reaches the leader. Test one regular forum: if something were wrong with the strategy, would anyone in the room say so? Start by asking the most junior person to speak first.</a:t>
+            </a:r>
+          </a:p>
+          <a:p>
+            <a:r>
+              <a:t>Source: Journal, 5 May 2026 — Professional Insights: Culture</a:t>
+            </a:r>
+          </a:p>
         </p:txBody>
       </p:sp>
       <p:sp>
@@ -727,6 +755,34 @@
 - ✎ Which of the four costs is most visible in your organisation right now? The cost most visible Where specifically is it appearing? What has it cost in execution momentum this quarter?</a:t>
             </a:r>
             <a:endParaRPr lang="en-US" dirty="0"/>
+          </a:p>
+          <a:p/>
+          <a:p>
+            <a:r>
+              <a:t>Professional insights:</a:t>
+            </a:r>
+          </a:p>
+          <a:p/>
+          <a:p>
+            <a:r>
+              <a:t>Quiet disengagement: The common response to a threat from within is suppression. Ask what created the conditions for it, and talk this week with someone whose quiet disengagement has been ignored.</a:t>
+            </a:r>
+          </a:p>
+          <a:p>
+            <a:r>
+              <a:t>Source: Journal, 10 June 2026 — Professional Insights: Leadership</a:t>
+            </a:r>
+          </a:p>
+          <a:p/>
+          <a:p>
+            <a:r>
+              <a:t>Emotional fatigue: Organisations that run in constant urgency, with no predictable rhythms or recovery seasons, produce people who are always bracing for impact. Rhythm gives people the structure to plan, rest and work.</a:t>
+            </a:r>
+          </a:p>
+          <a:p>
+            <a:r>
+              <a:t>Source: Journal, 8 January 2026 — Professional Insights: Culture</a:t>
+            </a:r>
           </a:p>
         </p:txBody>
       </p:sp>
@@ -993,6 +1049,34 @@
             </a:r>
             <a:endParaRPr lang="en-US" dirty="0"/>
           </a:p>
+          <a:p/>
+          <a:p>
+            <a:r>
+              <a:t>Professional insights:</a:t>
+            </a:r>
+          </a:p>
+          <a:p/>
+          <a:p>
+            <a:r>
+              <a:t>Fair-weather results: A culture can look cohesive in the annual survey and fracture under the first serious pressure. Pressure reveals the weakness that was already there. Ask participants to rate the culture as it behaves under pressure.</a:t>
+            </a:r>
+          </a:p>
+          <a:p>
+            <a:r>
+              <a:t>Source: Journal, 5 March 2026 — Professional Insights</a:t>
+            </a:r>
+          </a:p>
+          <a:p/>
+          <a:p>
+            <a:r>
+              <a:t>Measure from the bottom: Organisations that measure culture by the experience of their most senior people miss how most people experience it. Ask: how is the newest person experiencing this culture?</a:t>
+            </a:r>
+          </a:p>
+          <a:p>
+            <a:r>
+              <a:t>Source: Journal, 13 February 2026 — Professional Insights: Culture</a:t>
+            </a:r>
+          </a:p>
         </p:txBody>
       </p:sp>
       <p:sp>
@@ -1182,6 +1266,34 @@
 The Team Consolidation Excel captures all six participant scores, auto-averages by trait, flags high variance, and displays the team temperature. Enter individual scores before the Integration section discussion.</a:t>
             </a:r>
             <a:endParaRPr lang="en-US" dirty="0"/>
+          </a:p>
+          <a:p/>
+          <a:p>
+            <a:r>
+              <a:t>Professional insights:</a:t>
+            </a:r>
+          </a:p>
+          <a:p/>
+          <a:p>
+            <a:r>
+              <a:t>Rituals that outlived their meaning: Run three questions across one ritual: what value did this protect when it was created? Does it still protect that value? What would protect it now? Redesign the ritual or retire it; doing nothing is how cultures hollow out.</a:t>
+            </a:r>
+          </a:p>
+          <a:p>
+            <a:r>
+              <a:t>Source: Journal, 4 May 2026 — Professional Insights: Culture</a:t>
+            </a:r>
+          </a:p>
+          <a:p/>
+          <a:p>
+            <a:r>
+              <a:t>Reinforcing systems: Culture regresses quickly when boundaries and reinforcing systems weaken. Commitments cannot rely on moments of enthusiasm; they need systems, expectations, accountability and people willing to intervene when drift appears.</a:t>
+            </a:r>
+          </a:p>
+          <a:p>
+            <a:r>
+              <a:t>Source: Journal, 11 August 2026 — Professional Insights: Culture</a:t>
+            </a:r>
           </a:p>
         </p:txBody>
       </p:sp>
@@ -1433,6 +1545,45 @@
             </a:r>
             <a:endParaRPr lang="en-US" dirty="0"/>
           </a:p>
+          <a:p/>
+          <a:p>
+            <a:r>
+              <a:t>Professional insights:</a:t>
+            </a:r>
+          </a:p>
+          <a:p/>
+          <a:p>
+            <a:r>
+              <a:t>What leaders tolerate: Leaders shape culture through what they repeatedly tolerate, celebrate or ignore, as well as through their decisions.</a:t>
+            </a:r>
+          </a:p>
+          <a:p>
+            <a:r>
+              <a:t>Source: Journal, 27 July 2026 — Professional Insights: Leadership</a:t>
+            </a:r>
+          </a:p>
+          <a:p/>
+          <a:p>
+            <a:r>
+              <a:t>CFO · Resource fairness: Leaders lose credibility when they demand sacrifice from others while insulating themselves from its consequences.</a:t>
+            </a:r>
+          </a:p>
+          <a:p>
+            <a:r>
+              <a:t>Source: Journal, 7 August 2026 — Professional Insights: Leadership</a:t>
+            </a:r>
+          </a:p>
+          <a:p/>
+          <a:p>
+            <a:r>
+              <a:t>CHRO · Psychological safety: Leaders who never create genuine safety find that people manage them from a distance, assessing the relational risk before being open. Safety is built in small moments over a long time, and its absence shows up as managed distance.</a:t>
+            </a:r>
+          </a:p>
+          <a:p>
+            <a:r>
+              <a:t>Source: Journal, 1 February 2026 — Professional Insights: Leadership</a:t>
+            </a:r>
+          </a:p>
         </p:txBody>
       </p:sp>
       <p:sp>
@@ -1642,6 +1793,34 @@
 Your task: Coach Fatima on the difference between explaining the problem and owning it — and what owning it actually requires from her.</a:t>
             </a:r>
             <a:endParaRPr lang="en-US" dirty="0"/>
+          </a:p>
+          <a:p/>
+          <a:p>
+            <a:r>
+              <a:t>Professional insights:</a:t>
+            </a:r>
+          </a:p>
+          <a:p/>
+          <a:p>
+            <a:r>
+              <a:t>Stated issue and real issue: The surface complaint is often the one that is safe to raise. The real issue, about authority, recognition or influence, is harder to name. Coaching works on the real issue.</a:t>
+            </a:r>
+          </a:p>
+          <a:p>
+            <a:r>
+              <a:t>Source: Journal, 6 March 2026 — Professional Insights</a:t>
+            </a:r>
+          </a:p>
+          <a:p/>
+          <a:p>
+            <a:r>
+              <a:t>The soft-rebuke window: Every leader has a private list of things noticed and not addressed. For each, ask whether it is still in the soft-rebuke window or has moved into harder territory. Postponement is its own decision, and its cost compounds.</a:t>
+            </a:r>
+          </a:p>
+          <a:p>
+            <a:r>
+              <a:t>Source: Journal, 5 May 2026 — Professional Insights: Strategy</a:t>
+            </a:r>
           </a:p>
         </p:txBody>
       </p:sp>
@@ -1877,6 +2056,45 @@
             </a:r>
             <a:endParaRPr lang="en-US" dirty="0"/>
           </a:p>
+          <a:p/>
+          <a:p>
+            <a:r>
+              <a:t>Professional insights:</a:t>
+            </a:r>
+          </a:p>
+          <a:p/>
+          <a:p>
+            <a:r>
+              <a:t>A · Own the conversation first: Credibility is built through consistent personal commitment. The leader who has not decided cannot credibly call others to decide, so make your own commitment explicit before asking for theirs.</a:t>
+            </a:r>
+          </a:p>
+          <a:p>
+            <a:r>
+              <a:t>Source: Journal, 14 April 2026 — Professional Insights: Leadership</a:t>
+            </a:r>
+          </a:p>
+          <a:p/>
+          <a:p>
+            <a:r>
+              <a:t>C · Ask for something real: A leader who keeps compensating for someone’s stuckness relieves their own friction and leaves the person’s will untouched. Ask directly whether they want to move: capability can be resourced, and the desire to change has to come from them.</a:t>
+            </a:r>
+          </a:p>
+          <a:p>
+            <a:r>
+              <a:t>Source: Journal, 1 July 2026 — Professional Insights: Leadership</a:t>
+            </a:r>
+          </a:p>
+          <a:p/>
+          <a:p>
+            <a:r>
+              <a:t>I · Say the honest thing: People defend against accusation and recognise themselves in a mirror. Feedback that triggers self-recognition changes behaviour more than feedback experienced as attack.</a:t>
+            </a:r>
+          </a:p>
+          <a:p>
+            <a:r>
+              <a:t>Source: Journal, 28 May 2026 — Professional Insights: Culture</a:t>
+            </a:r>
+          </a:p>
         </p:txBody>
       </p:sp>
       <p:sp>
@@ -2073,6 +2291,34 @@
             </a:r>
             <a:endParaRPr lang="en-US" dirty="0"/>
           </a:p>
+          <a:p/>
+          <a:p>
+            <a:r>
+              <a:t>Professional insights:</a:t>
+            </a:r>
+          </a:p>
+          <a:p/>
+          <a:p>
+            <a:r>
+              <a:t>Softening: A leader who needs approval more than integrity softens difficult realities, avoids necessary confrontation and lets dysfunction continue. Use this with “which did you abandon or soften?”</a:t>
+            </a:r>
+          </a:p>
+          <a:p>
+            <a:r>
+              <a:t>Source: Journal, 23 July 2026 — Professional Insights: Leadership</a:t>
+            </a:r>
+          </a:p>
+          <a:p/>
+          <a:p>
+            <a:r>
+              <a:t>The avoided conversation: Reorganisations, communications drives and new frameworks can multiply as substitutes for the one hard conversation that is actually required. Name it and schedule it.</a:t>
+            </a:r>
+          </a:p>
+          <a:p>
+            <a:r>
+              <a:t>Source: Journal, 11 May 2026 — Professional Insights: Leadership</a:t>
+            </a:r>
+          </a:p>
         </p:txBody>
       </p:sp>
       <p:sp>
@@ -2372,6 +2618,23 @@
             </a:r>
             <a:endParaRPr lang="en-US" dirty="0"/>
           </a:p>
+          <a:p/>
+          <a:p>
+            <a:r>
+              <a:t>Professional insights:</a:t>
+            </a:r>
+          </a:p>
+          <a:p/>
+          <a:p>
+            <a:r>
+              <a:t>Signals from authority: Collective behaviour follows the signals communicated by those in authority. Once people learn that honest correction attracts punishment, silence becomes a survival mechanism. Such an environment can look orderly while being internally fragile, because risks and failures stay undisclosed.</a:t>
+            </a:r>
+          </a:p>
+          <a:p>
+            <a:r>
+              <a:t>Source: Journal, 21 July 2026 — Professional Insights: Culture</a:t>
+            </a:r>
+          </a:p>
         </p:txBody>
       </p:sp>
       <p:sp>
@@ -2465,6 +2728,23 @@
             </a:r>
             <a:endParaRPr lang="en-US" dirty="0"/>
           </a:p>
+          <a:p/>
+          <a:p>
+            <a:r>
+              <a:t>Professional insights:</a:t>
+            </a:r>
+          </a:p>
+          <a:p/>
+          <a:p>
+            <a:r>
+              <a:t>Culture as experience: Culture is the accumulated experience people have of how the organisation actually works. Conduct, order and service reveal more than formal declarations. Fear reduces participation, narrows imagination and keeps people focused on protection.</a:t>
+            </a:r>
+          </a:p>
+          <a:p>
+            <a:r>
+              <a:t>Source: Journal, 16 July 2026 — Professional Insights: Culture</a:t>
+            </a:r>
+          </a:p>
         </p:txBody>
       </p:sp>
       <p:sp>
@@ -2578,6 +2858,45 @@
             </a:r>
             <a:endParaRPr lang="en-US" dirty="0"/>
           </a:p>
+          <a:p/>
+          <a:p>
+            <a:r>
+              <a:t>Professional insights:</a:t>
+            </a:r>
+          </a:p>
+          <a:p/>
+          <a:p>
+            <a:r>
+              <a:t>Trait 1 · Minimal Politics: Most grievances in a senior team have been aired in three corridor conversations before they reach the colleague concerned. Have the conversation with the colleague first, quietly and directly.</a:t>
+            </a:r>
+          </a:p>
+          <a:p>
+            <a:r>
+              <a:t>Source: Journal, 7 May 2026 — Professional Insights: Leadership</a:t>
+            </a:r>
+          </a:p>
+          <a:p/>
+          <a:p>
+            <a:r>
+              <a:t>Unprocessed conflict: Unprocessed conflict (the moment of unfairness, the overlooked contribution, the public criticism) waits for the next pressure point to surface. Creating the conditions to process difficult moments honestly is operational hygiene.</a:t>
+            </a:r>
+          </a:p>
+          <a:p>
+            <a:r>
+              <a:t>Source: Journal, 27 January 2026 — Professional Insights: Culture</a:t>
+            </a:r>
+          </a:p>
+          <a:p/>
+          <a:p>
+            <a:r>
+              <a:t>Trait 2 · Minimal Confusion: When the stakes are high, role clarity becomes a survival requirement: no overlapping mandates and no ambiguous accountabilities.</a:t>
+            </a:r>
+          </a:p>
+          <a:p>
+            <a:r>
+              <a:t>Source: Journal, 2 March 2026 — Professional Insights</a:t>
+            </a:r>
+          </a:p>
         </p:txBody>
       </p:sp>
       <p:sp>
@@ -2691,6 +3010,45 @@
             </a:r>
             <a:endParaRPr lang="en-US" dirty="0"/>
           </a:p>
+          <a:p/>
+          <a:p>
+            <a:r>
+              <a:t>Professional insights:</a:t>
+            </a:r>
+          </a:p>
+          <a:p/>
+          <a:p>
+            <a:r>
+              <a:t>Trust · the foundation: The leader who keeps commitments that carry no external enforcement builds the trust that survives pressure. People watch what you do with the obligations you could quietly drop.</a:t>
+            </a:r>
+          </a:p>
+          <a:p>
+            <a:r>
+              <a:t>Source: Journal, 27 May 2026 — Professional Insights: Leadership</a:t>
+            </a:r>
+          </a:p>
+          <a:p/>
+          <a:p>
+            <a:r>
+              <a:t>Beliefs to actions: Shared culture emerges when common beliefs become visible behaviours. Communication alone cannot sustain it; practices must reinforce what the community says it values.</a:t>
+            </a:r>
+          </a:p>
+          <a:p>
+            <a:r>
+              <a:t>Source: Journal, 9 August 2026 — Professional Insights: Culture</a:t>
+            </a:r>
+          </a:p>
+          <a:p/>
+          <a:p>
+            <a:r>
+              <a:t>The belief beneath the behaviour: Sustainable correction happens when the underlying logic changes. Ask what people are doing, and also: what belief is making this behaviour seem reasonable?</a:t>
+            </a:r>
+          </a:p>
+          <a:p>
+            <a:r>
+              <a:t>Source: Journal, 28 September 2026 — Professional Insights: Leadership</a:t>
+            </a:r>
+          </a:p>
         </p:txBody>
       </p:sp>
       <p:sp>
@@ -2788,6 +3146,34 @@
             </a:r>
             <a:endParaRPr lang="en-US" dirty="0"/>
           </a:p>
+          <a:p/>
+          <a:p>
+            <a:r>
+              <a:t>Professional insights:</a:t>
+            </a:r>
+          </a:p>
+          <a:p/>
+          <a:p>
+            <a:r>
+              <a:t>Drift by toleration: Cultural drift happens through a series of small, unchallenged accommodations: what is tolerated becomes normal. By the time the values have shifted, no one can point to the moment it happened. Act on early drift.</a:t>
+            </a:r>
+          </a:p>
+          <a:p>
+            <a:r>
+              <a:t>Source: Journal, 16 April 2026 — Professional Insights: Culture</a:t>
+            </a:r>
+          </a:p>
+          <a:p/>
+          <a:p>
+            <a:r>
+              <a:t>Broken promises: A promise to recognise, promote or advocate for someone that is never kept is one of the most damaging trust events in an organisation. Cultures that forget the promises made in high moments breed a cynicism that is hard to reverse. Use this with “Morale declines”.</a:t>
+            </a:r>
+          </a:p>
+          <a:p>
+            <a:r>
+              <a:t>Source: Journal, 25 January 2026 — Professional Insights: Culture</a:t>
+            </a:r>
+          </a:p>
         </p:txBody>
       </p:sp>
       <p:sp>
@@ -2886,6 +3272,23 @@
 Time: the facilitator file gives no minute timing for this section.</a:t>
             </a:r>
             <a:endParaRPr lang="en-US" dirty="0"/>
+          </a:p>
+          <a:p/>
+          <a:p>
+            <a:r>
+              <a:t>Professional insights:</a:t>
+            </a:r>
+          </a:p>
+          <a:p/>
+          <a:p>
+            <a:r>
+              <a:t>Where capability sits: The loudest, most senior or most publicly celebrated contributors are not necessarily the most critical. Leaders need to understand where indispensable capability actually sits within the system.</a:t>
+            </a:r>
+          </a:p>
+          <a:p>
+            <a:r>
+              <a:t>Source: Journal, 9 September 2026 — Professional Insights: Leadership</a:t>
+            </a:r>
           </a:p>
         </p:txBody>
       </p:sp>

--- a/Unit decks/Unit 11 - Culture Reinforcement & Organisational Health.pptx
+++ b/Unit decks/Unit 11 - Culture Reinforcement & Organisational Health.pptx
@@ -533,6 +533,68 @@
             </a:r>
             <a:endParaRPr lang="en-US" dirty="0"/>
           </a:p>
+          <a:p/>
+          <a:p>
+            <a:r>
+              <a:t>Source detail (S2R® manuscript):</a:t>
+            </a:r>
+          </a:p>
+          <a:p/>
+          <a:p>
+            <a:r>
+              <a:t>Module context: Grounding is where strategy execution is sustained. It is the discipline that ensures what has been defined in Direction and driven through Influence is fully translated into consistent, lived organisational performance.</a:t>
+            </a:r>
+          </a:p>
+          <a:p>
+            <a:r>
+              <a:t>Grounding carries a singular responsibility: to close the gap between what is intended and what is actually consistently realised.</a:t>
+            </a:r>
+          </a:p>
+          <a:p>
+            <a:r>
+              <a:t>Grounding establishes a non-negotiable standard:</a:t>
+            </a:r>
+          </a:p>
+          <a:p>
+            <a:r>
+              <a:t>- What is assigned must be fully executed.</a:t>
+            </a:r>
+          </a:p>
+          <a:p>
+            <a:r>
+              <a:t>- What is executed must be sustained.</a:t>
+            </a:r>
+          </a:p>
+          <a:p>
+            <a:r>
+              <a:t>- What is sustained must be reinforced through systems, culture, and accountability.</a:t>
+            </a:r>
+          </a:p>
+          <a:p>
+            <a:r>
+              <a:t>Within DIG:</a:t>
+            </a:r>
+          </a:p>
+          <a:p>
+            <a:r>
+              <a:t>- Direction defines the strategic position and intended outcomes.</a:t>
+            </a:r>
+          </a:p>
+          <a:p>
+            <a:r>
+              <a:t>- Influence mobilises leadership to drive execution.</a:t>
+            </a:r>
+          </a:p>
+          <a:p>
+            <a:r>
+              <a:t>- Grounding ensures those outcomes are consistently achieved, embedded, and maintained.</a:t>
+            </a:r>
+          </a:p>
+          <a:p>
+            <a:r>
+              <a:t>It is through Grounding that strategy moves from activity to performance, from progress to completion, and from isolated success to organisational discipline. Grounding is therefore the condition that stabilises execution into sustained results.</a:t>
+            </a:r>
+          </a:p>
         </p:txBody>
       </p:sp>
       <p:sp>
@@ -633,6 +695,18 @@
           <a:p/>
           <a:p>
             <a:r>
+              <a:t>Source detail (S2R® manuscript):</a:t>
+            </a:r>
+          </a:p>
+          <a:p/>
+          <a:p>
+            <a:r>
+              <a:t>2.2 in one line: Organisational health is never created by statements about culture or values.</a:t>
+            </a:r>
+          </a:p>
+          <a:p/>
+          <a:p>
+            <a:r>
               <a:t>Professional insights:</a:t>
             </a:r>
           </a:p>
@@ -881,6 +955,18 @@
 Time: 8–10 minutes for participants to complete the thermometer individually and in silence (no discussion while scoring).</a:t>
             </a:r>
             <a:endParaRPr lang="en-US" dirty="0"/>
+          </a:p>
+          <a:p/>
+          <a:p>
+            <a:r>
+              <a:t>Source detail (S2R® manuscript):</a:t>
+            </a:r>
+          </a:p>
+          <a:p/>
+          <a:p>
+            <a:r>
+              <a:t>Why early signals matter: Organisational health rarely deteriorates suddenly. It reveals itself gradually through signals that emerge across functions long before results collapse. The challenge for leadership teams is to recognise that health has declined and, beyond that, to learn to read the early signals that indicate whether the execution environment is strengthening or weakening.</a:t>
+            </a:r>
           </a:p>
         </p:txBody>
       </p:sp>
@@ -1052,6 +1138,39 @@
           <a:p/>
           <a:p>
             <a:r>
+              <a:t>Source detail (S2R® manuscript):</a:t>
+            </a:r>
+          </a:p>
+          <a:p/>
+          <a:p>
+            <a:r>
+              <a:t>What the instrument is: The Strategy2Results® process detects organisational health through a structured diagnostic instrument: the Organisational Health Thermometer. This tool functions as an early-warning instrument at the team or unit level. Like a medical thermometer, it reveals whether the team is operating within a healthy range, so that leaders can intervene before conditions deteriorate further. It does not treat the illness itself.</a:t>
+            </a:r>
+          </a:p>
+          <a:p/>
+          <a:p>
+            <a:r>
+              <a:t>The opposite behaviours the statements were written against:</a:t>
+            </a:r>
+          </a:p>
+          <a:p>
+            <a:r>
+              <a:t>Trait 1 · Minimal Politics: issues and concerns discussed in corridors after the meeting; information controlled to strengthen a leader’s own position; decisions guided by individual or functional interest; conflicts between teams settled through informal influence.</a:t>
+            </a:r>
+          </a:p>
+          <a:p>
+            <a:r>
+              <a:t>Trait 3 · High Morale: recognition that is just performative; an environment that drains commitment during demanding periods.</a:t>
+            </a:r>
+          </a:p>
+          <a:p>
+            <a:r>
+              <a:t>Trait 4 · High Productivity: meetings that are simply update exchanges; systems and processes that create friction between teams.</a:t>
+            </a:r>
+          </a:p>
+          <a:p/>
+          <a:p>
+            <a:r>
               <a:t>Professional insights:</a:t>
             </a:r>
           </a:p>
@@ -1270,6 +1389,23 @@
           <a:p/>
           <a:p>
             <a:r>
+              <a:t>Source detail (S2R® manuscript):</a:t>
+            </a:r>
+          </a:p>
+          <a:p/>
+          <a:p>
+            <a:r>
+              <a:t>Team consolidation (after individual completion): Once every participant has completed their individual assessment, scores are entered into the Team Consolidation Excel. The team average score determines the shared temperature reading.</a:t>
+            </a:r>
+          </a:p>
+          <a:p>
+            <a:r>
+              <a:t>The consolidated view also reveals something no individual score can show alone: which traits are scoring consistently low across the team, and which show high variance. High variance on a single trait means different people are experiencing the organisation very differently. That difference is itself a signal.</a:t>
+            </a:r>
+          </a:p>
+          <a:p/>
+          <a:p>
+            <a:r>
               <a:t>Professional insights:</a:t>
             </a:r>
           </a:p>
@@ -1392,6 +1528,23 @@
 The CXO Health Architecture content is in the notes of the next slide.</a:t>
             </a:r>
             <a:endParaRPr lang="en-US" dirty="0"/>
+          </a:p>
+          <a:p/>
+          <a:p>
+            <a:r>
+              <a:t>Source detail (S2R® manuscript):</a:t>
+            </a:r>
+          </a:p>
+          <a:p/>
+          <a:p>
+            <a:r>
+              <a:t>The shared contract: Organisational health is the collective outcome of leadership behaviour, governance discipline, decision logic, and system design that shape the daily experience of people across the enterprise. Responsibility for it extends beyond any single function and beyond HR.</a:t>
+            </a:r>
+          </a:p>
+          <a:p>
+            <a:r>
+              <a:t>The architecture table clarifies which executive role anchors which health domain, the commitment required, and the risk that emerges when leadership stewardship weakens.</a:t>
+            </a:r>
           </a:p>
         </p:txBody>
       </p:sp>
@@ -1548,6 +1701,74 @@
           <a:p/>
           <a:p>
             <a:r>
+              <a:t>Source detail (S2R® manuscript):</a:t>
+            </a:r>
+          </a:p>
+          <a:p/>
+          <a:p>
+            <a:r>
+              <a:t>Primary health domain in full (what each role’s domain covers):</a:t>
+            </a:r>
+          </a:p>
+          <a:p>
+            <a:r>
+              <a:t>CEO: the signal that tells the organisation where it is going and how leaders are expected to work together.</a:t>
+            </a:r>
+          </a:p>
+          <a:p>
+            <a:r>
+              <a:t>CFO: the financial conditions that determine whether employees believe resources are allocated fairly.</a:t>
+            </a:r>
+          </a:p>
+          <a:p>
+            <a:r>
+              <a:t>COO: the consistency of processes, systems, and working rhythms that help teams perform efficiently.</a:t>
+            </a:r>
+          </a:p>
+          <a:p>
+            <a:r>
+              <a:t>CHRO: the workplace conditions that determine whether people feel respected, supported, and valued.</a:t>
+            </a:r>
+          </a:p>
+          <a:p>
+            <a:r>
+              <a:t>CTO / CIO: the systems and digital tools that support or hinder employees’ ability to work efficiently.</a:t>
+            </a:r>
+          </a:p>
+          <a:p>
+            <a:r>
+              <a:t>CMO: the connection between the organisation’s external promise and employees’ internal experience.</a:t>
+            </a:r>
+          </a:p>
+          <a:p>
+            <a:r>
+              <a:t>CCO: the working conditions that enable revenue teams to perform sustainably.</a:t>
+            </a:r>
+          </a:p>
+          <a:p>
+            <a:r>
+              <a:t>CPO: the procurement processes that influence collaboration across departments.</a:t>
+            </a:r>
+          </a:p>
+          <a:p>
+            <a:r>
+              <a:t>CRO: the organisational environment that determines whether employees feel safe reporting problems early.</a:t>
+            </a:r>
+          </a:p>
+          <a:p>
+            <a:r>
+              <a:t>CSO: the connection between the organisation’s strategy and the day-to-day work of teams.</a:t>
+            </a:r>
+          </a:p>
+          <a:p/>
+          <a:p>
+            <a:r>
+              <a:t>What the architecture shows: When each executive actively reinforces their domain of health stewardship, the organisation maintains the behavioural conditions required for high-velocity strategy execution. When leadership attention weakens across these domains, the organisation experiences the opposite: confusion increases, politics rise, morale declines, productivity slows, and talent retention becomes increasingly fragile.</a:t>
+            </a:r>
+          </a:p>
+          <a:p/>
+          <a:p>
+            <a:r>
               <a:t>Professional insights:</a:t>
             </a:r>
           </a:p>
@@ -1684,6 +1905,18 @@
             </a:r>
             <a:endParaRPr lang="en-US" dirty="0"/>
           </a:p>
+          <a:p/>
+          <a:p>
+            <a:r>
+              <a:t>Source detail (S2R® manuscript):</a:t>
+            </a:r>
+          </a:p>
+          <a:p/>
+          <a:p>
+            <a:r>
+              <a:t>The context: The scenarios describe real leadership situations where one or more of the five observable health traits has broken down. Each scenario involves a capable person who is not performing at the standard the organisation needs, and a leader who has been avoiding the conversation.</a:t>
+            </a:r>
+          </a:p>
         </p:txBody>
       </p:sp>
       <p:sp>
@@ -1793,6 +2026,33 @@
 Your task: Coach Fatima on the difference between explaining the problem and owning it — and what owning it actually requires from her.</a:t>
             </a:r>
             <a:endParaRPr lang="en-US" dirty="0"/>
+          </a:p>
+          <a:p/>
+          <a:p>
+            <a:r>
+              <a:t>Source detail (S2R® manuscript):</a:t>
+            </a:r>
+          </a:p>
+          <a:p/>
+          <a:p>
+            <a:r>
+              <a:t>Further scenario detail:</a:t>
+            </a:r>
+          </a:p>
+          <a:p>
+            <a:r>
+              <a:t>Scenario 2 · The Confusion Spiral: Priya does not lack capability.</a:t>
+            </a:r>
+          </a:p>
+          <a:p>
+            <a:r>
+              <a:t>Scenario 3 · The Quiet Exit: In the last team session James sat at the back and said nothing. You have been telling yourself he is just tired. You have been wrong.</a:t>
+            </a:r>
+          </a:p>
+          <a:p>
+            <a:r>
+              <a:t>Scenario 4 · The Execution Drag: The organisation is absorbing the cost of Fatima’s avoidance without anyone having named it directly.</a:t>
+            </a:r>
           </a:p>
           <a:p/>
           <a:p>
@@ -2059,6 +2319,18 @@
           <a:p/>
           <a:p>
             <a:r>
+              <a:t>Source detail (S2R® manuscript):</a:t>
+            </a:r>
+          </a:p>
+          <a:p/>
+          <a:p>
+            <a:r>
+              <a:t>Two stances carry a warning in their full wording: under Commitment, a comfortable ask is the thing to avoid; under Engagement, conditions that produce compliance are the thing to avoid.</a:t>
+            </a:r>
+          </a:p>
+          <a:p/>
+          <a:p>
+            <a:r>
               <a:t>Professional insights:</a:t>
             </a:r>
           </a:p>
@@ -2195,6 +2467,18 @@
             </a:r>
             <a:endParaRPr lang="en-US" dirty="0"/>
           </a:p>
+          <a:p/>
+          <a:p>
+            <a:r>
+              <a:t>Source detail (S2R® manuscript):</a:t>
+            </a:r>
+          </a:p>
+          <a:p/>
+          <a:p>
+            <a:r>
+              <a:t>Coach in pairs, one further rule: the coaching partner does not advise.</a:t>
+            </a:r>
+          </a:p>
         </p:txBody>
       </p:sp>
       <p:sp>
@@ -2421,6 +2705,43 @@
             </a:r>
             <a:endParaRPr lang="en-US" dirty="0"/>
           </a:p>
+          <a:p/>
+          <a:p>
+            <a:r>
+              <a:t>Source detail (S2R® manuscript):</a:t>
+            </a:r>
+          </a:p>
+          <a:p/>
+          <a:p>
+            <a:r>
+              <a:t>What the unit recognises: This unit focuses on the internal conditions that determine whether strategy can actually be executed. It recognises a critical reality: the effectiveness of every strategic system (direction, execution, performance management, and ESRG alignment) depends on the behavioural environment in which people work.</a:t>
+            </a:r>
+          </a:p>
+          <a:p>
+            <a:r>
+              <a:t>Awareness (What): Organisational health refers to the quality of the internal environment in which people collaborate, make decisions, and execute strategy.</a:t>
+            </a:r>
+          </a:p>
+          <a:p>
+            <a:r>
+              <a:t>Intelligence (Why): When trust declines, communication becomes cautious. When clarity disappears, coordination slows. When morale weakens, discretionary effort declines. When health deteriorates, even strong strategies lose momentum.</a:t>
+            </a:r>
+          </a:p>
+          <a:p>
+            <a:r>
+              <a:t>Extrapolating (Where): Leaders detect where organisational health signals appear across the enterprise through two complementary diagnostics: the Organisational Health Thermometer (team-level early warning) and the Enterprise COMPASS Assessment (enterprise-wide capability across seven High Flammable zones). When negative signals appear, leaders apply the ACE-IT behavioural guardrails (Accountability, Commitment, Engagement, Integrity, Transparency) to stabilise the organisation and guide behaviour back toward healthy execution.</a:t>
+            </a:r>
+          </a:p>
+          <a:p>
+            <a:r>
+              <a:t>Integration (Collective): Each executive role influences a specific domain, from strategic clarity and operational discipline to employee experience and system productivity. When executive leadership reinforces these domains together, the organisation sustains the behavioural conditions required for high-velocity execution. When leadership attention weakens, politics increase, confusion spreads, morale declines, productivity slows, and turnover risk rises.</a:t>
+            </a:r>
+          </a:p>
+          <a:p>
+            <a:r>
+              <a:t>Through collective diagnosis and intervention, the leadership team designs a cultural reinforcement plan that protects organisational health and sustains execution capability over time.</a:t>
+            </a:r>
+          </a:p>
         </p:txBody>
       </p:sp>
       <p:sp>
@@ -2861,6 +3182,43 @@
           <a:p/>
           <a:p>
             <a:r>
+              <a:t>Source detail (S2R® manuscript):</a:t>
+            </a:r>
+          </a:p>
+          <a:p/>
+          <a:p>
+            <a:r>
+              <a:t>Further detail on the traits:</a:t>
+            </a:r>
+          </a:p>
+          <a:p>
+            <a:r>
+              <a:t>The traits as a set: The five traits are not aspirational slogans or cultural statements.</a:t>
+            </a:r>
+          </a:p>
+          <a:p>
+            <a:r>
+              <a:t>Trait 1 · Minimal Politics: informal power dynamics carry no weight in decisions.</a:t>
+            </a:r>
+          </a:p>
+          <a:p>
+            <a:r>
+              <a:t>Trait 3 · High Morale: high morale does not mean work is always easy.</a:t>
+            </a:r>
+          </a:p>
+          <a:p>
+            <a:r>
+              <a:t>Trait 4 · High Productivity: the increase does not depend on people working harder.</a:t>
+            </a:r>
+          </a:p>
+          <a:p>
+            <a:r>
+              <a:t>Trait 5 · Low Turnover: attrition constantly resets institutional knowledge; where people stay, it accumulates.</a:t>
+            </a:r>
+          </a:p>
+          <a:p/>
+          <a:p>
+            <a:r>
               <a:t>Professional insights:</a:t>
             </a:r>
           </a:p>
@@ -3013,6 +3371,18 @@
           <a:p/>
           <a:p>
             <a:r>
+              <a:t>Source detail (S2R® manuscript):</a:t>
+            </a:r>
+          </a:p>
+          <a:p/>
+          <a:p>
+            <a:r>
+              <a:t>The chain in words: Trust shapes experiences. Experiences shape beliefs. Beliefs shape actions. Actions produce results. When these layers reinforce one another, organisational health becomes self-sustaining.</a:t>
+            </a:r>
+          </a:p>
+          <a:p/>
+          <a:p>
+            <a:r>
               <a:t>Professional insights:</a:t>
             </a:r>
           </a:p>
@@ -3272,6 +3642,18 @@
 Time: the facilitator file gives no minute timing for this section.</a:t>
             </a:r>
             <a:endParaRPr lang="en-US" dirty="0"/>
+          </a:p>
+          <a:p/>
+          <a:p>
+            <a:r>
+              <a:t>Source detail (S2R® manuscript):</a:t>
+            </a:r>
+          </a:p>
+          <a:p/>
+          <a:p>
+            <a:r>
+              <a:t>Opening point: For executives, the most important implication of the Organisational Health Pyramid is that leaders do not create organisational health through statements about values. The consistent behaviours described above are what create it.</a:t>
+            </a:r>
           </a:p>
           <a:p/>
           <a:p>

--- a/Unit decks/Unit 11 - Culture Reinforcement & Organisational Health.pptx
+++ b/Unit decks/Unit 11 - Culture Reinforcement & Organisational Health.pptx
@@ -4508,6 +4508,13 @@
 Say: "This work is presented only during the final capstone panel assessment."
 4. Bridge to the close.
 Say: "Let us close the unit."</a:t>
+            </a:r>
+            <a:endParaRPr lang="en-US" dirty="0"/>
+          </a:p>
+          <a:p>
+            <a:r>
+              <a:rPr lang="en-US" dirty="0"/>
+              <a:t>Close the group work with Our Position. Say: "When your record is complete, write as a group a short summary statement of your team's position from this unit, in the unit's own terms. Every member agrees it with the rest of the record. It closes this unit's section of your Capstone S2R Blueprint and guides the assessors through your work."</a:t>
             </a:r>
             <a:endParaRPr lang="en-US" dirty="0"/>
           </a:p>
